--- a/ppt/1.Redis로 쓰기작업에 대한 DB 부하줄이기.pptx
+++ b/ppt/1.Redis로 쓰기작업에 대한 DB 부하줄이기.pptx
@@ -140,6 +140,9 @@
         </p14:section>
       </p14:sectionLst>
     </p:ext>
+    <p:ext uri="{EFAFB233-063F-42B5-8137-9DF3F51BA10A}">
+      <p15:sldGuideLst xmlns:p15="http://schemas.microsoft.com/office/powerpoint/2012/main"/>
+    </p:ext>
   </p:extLst>
 </p:presentation>
 </file>
@@ -370,7 +373,7 @@
           <a:p>
             <a:fld id="{23DDAEC9-225D-40EF-9156-AC567F55CA1A}" type="datetimeFigureOut">
               <a:rPr lang="ko-KR" altLang="en-US" smtClean="0"/>
-              <a:t>2026-08-27</a:t>
+              <a:t>2026-08-28</a:t>
             </a:fld>
             <a:endParaRPr lang="ko-KR" altLang="en-US"/>
           </a:p>
@@ -578,7 +581,7 @@
           <a:p>
             <a:fld id="{23DDAEC9-225D-40EF-9156-AC567F55CA1A}" type="datetimeFigureOut">
               <a:rPr lang="ko-KR" altLang="en-US" smtClean="0"/>
-              <a:t>2026-08-27</a:t>
+              <a:t>2026-08-28</a:t>
             </a:fld>
             <a:endParaRPr lang="ko-KR" altLang="en-US"/>
           </a:p>
@@ -834,7 +837,7 @@
           <a:p>
             <a:fld id="{23DDAEC9-225D-40EF-9156-AC567F55CA1A}" type="datetimeFigureOut">
               <a:rPr lang="ko-KR" altLang="en-US" smtClean="0"/>
-              <a:t>2026-08-27</a:t>
+              <a:t>2026-08-28</a:t>
             </a:fld>
             <a:endParaRPr lang="ko-KR" altLang="en-US"/>
           </a:p>
@@ -1008,7 +1011,7 @@
           <a:p>
             <a:fld id="{23DDAEC9-225D-40EF-9156-AC567F55CA1A}" type="datetimeFigureOut">
               <a:rPr lang="ko-KR" altLang="en-US" smtClean="0"/>
-              <a:t>2026-08-27</a:t>
+              <a:t>2026-08-28</a:t>
             </a:fld>
             <a:endParaRPr lang="ko-KR" altLang="en-US"/>
           </a:p>
@@ -1351,7 +1354,7 @@
           <a:p>
             <a:fld id="{23DDAEC9-225D-40EF-9156-AC567F55CA1A}" type="datetimeFigureOut">
               <a:rPr lang="ko-KR" altLang="en-US" smtClean="0"/>
-              <a:t>2026-08-27</a:t>
+              <a:t>2026-08-28</a:t>
             </a:fld>
             <a:endParaRPr lang="ko-KR" altLang="en-US"/>
           </a:p>
@@ -1626,7 +1629,7 @@
           <a:p>
             <a:fld id="{23DDAEC9-225D-40EF-9156-AC567F55CA1A}" type="datetimeFigureOut">
               <a:rPr lang="ko-KR" altLang="en-US" smtClean="0"/>
-              <a:t>2026-08-27</a:t>
+              <a:t>2026-08-28</a:t>
             </a:fld>
             <a:endParaRPr lang="ko-KR" altLang="en-US"/>
           </a:p>
@@ -2005,7 +2008,7 @@
           <a:p>
             <a:fld id="{23DDAEC9-225D-40EF-9156-AC567F55CA1A}" type="datetimeFigureOut">
               <a:rPr lang="ko-KR" altLang="en-US" smtClean="0"/>
-              <a:t>2026-08-27</a:t>
+              <a:t>2026-08-28</a:t>
             </a:fld>
             <a:endParaRPr lang="ko-KR" altLang="en-US"/>
           </a:p>
@@ -2123,7 +2126,7 @@
           <a:p>
             <a:fld id="{23DDAEC9-225D-40EF-9156-AC567F55CA1A}" type="datetimeFigureOut">
               <a:rPr lang="ko-KR" altLang="en-US" smtClean="0"/>
-              <a:t>2026-08-27</a:t>
+              <a:t>2026-08-28</a:t>
             </a:fld>
             <a:endParaRPr lang="ko-KR" altLang="en-US"/>
           </a:p>
@@ -2294,7 +2297,7 @@
           <a:p>
             <a:fld id="{23DDAEC9-225D-40EF-9156-AC567F55CA1A}" type="datetimeFigureOut">
               <a:rPr lang="ko-KR" altLang="en-US" smtClean="0"/>
-              <a:t>2026-08-27</a:t>
+              <a:t>2026-08-28</a:t>
             </a:fld>
             <a:endParaRPr lang="ko-KR" altLang="en-US"/>
           </a:p>
@@ -2648,7 +2651,7 @@
           <a:p>
             <a:fld id="{23DDAEC9-225D-40EF-9156-AC567F55CA1A}" type="datetimeFigureOut">
               <a:rPr lang="ko-KR" altLang="en-US" smtClean="0"/>
-              <a:t>2026-08-27</a:t>
+              <a:t>2026-08-28</a:t>
             </a:fld>
             <a:endParaRPr lang="ko-KR" altLang="en-US"/>
           </a:p>
@@ -3030,7 +3033,7 @@
           <a:p>
             <a:fld id="{23DDAEC9-225D-40EF-9156-AC567F55CA1A}" type="datetimeFigureOut">
               <a:rPr lang="ko-KR" altLang="en-US" smtClean="0"/>
-              <a:t>2026-08-27</a:t>
+              <a:t>2026-08-28</a:t>
             </a:fld>
             <a:endParaRPr lang="ko-KR" altLang="en-US"/>
           </a:p>
@@ -3317,7 +3320,7 @@
           <a:p>
             <a:fld id="{23DDAEC9-225D-40EF-9156-AC567F55CA1A}" type="datetimeFigureOut">
               <a:rPr lang="ko-KR" altLang="en-US" smtClean="0"/>
-              <a:t>2026-08-27</a:t>
+              <a:t>2026-08-28</a:t>
             </a:fld>
             <a:endParaRPr lang="ko-KR" altLang="en-US"/>
           </a:p>
@@ -5564,7 +5567,7 @@
         <p:spPr>
           <a:xfrm>
             <a:off x="1060334" y="1939636"/>
-            <a:ext cx="10132291" cy="830997"/>
+            <a:ext cx="10132291" cy="1384995"/>
           </a:xfrm>
           <a:prstGeom prst="rect">
             <a:avLst/>
@@ -5650,6 +5653,18 @@
               <a:rPr lang="en-US" altLang="ko-KR" sz="1200"/>
               <a:t>docker run -d --name redis-2-mysqldb  -p 3324:3306 -e MYSQL_DATABASE=redis-2-mysqldb -e MYSQL_ROOT_PASSWORD=password -e --cpus="0.2" --memory="256m" mysql:latest</a:t>
             </a:r>
+          </a:p>
+          <a:p>
+            <a:endParaRPr lang="en-US" altLang="ko-KR" sz="1200"/>
+          </a:p>
+          <a:p>
+            <a:r>
+              <a:rPr lang="en-US" altLang="ko-KR" sz="1200"/>
+              <a:t>docker run -d --name redis-2-mysqldb  -p 3324:3306 -e MYSQL_DATABASE=redis-2-mysqldb -e MYSQL_ROOT_PASSWORD=password mysql:latest</a:t>
+            </a:r>
+          </a:p>
+          <a:p>
+            <a:endParaRPr lang="en-US" altLang="ko-KR" sz="1200"/>
           </a:p>
         </p:txBody>
       </p:sp>
@@ -5675,7 +5690,7 @@
         </p:blipFill>
         <p:spPr>
           <a:xfrm>
-            <a:off x="114937" y="2868149"/>
+            <a:off x="94412" y="3429000"/>
             <a:ext cx="12003175" cy="438211"/>
           </a:xfrm>
           <a:prstGeom prst="rect">
